--- a/docs/Async-Page-Pipeline-Technical-Brief.pptx
+++ b/docs/Async-Page-Pipeline-Technical-Brief.pptx
@@ -2599,12 +2599,14 @@
             </a:pPr>
             <a:r>
               <a:rPr lang="en-US" sz="1100" dirty="0">
+                <a:u ln="dash"/>
                 <a:solidFill>
                   <a:srgbClr val="7E97A8"/>
                 </a:solidFill>
                 <a:latin typeface="Microsoft YaHei" pitchFamily="34" charset="0"/>
                 <a:ea typeface="Microsoft YaHei" pitchFamily="34" charset="-122"/>
                 <a:cs typeface="Microsoft YaHei" pitchFamily="34" charset="-120"/>
+                <a:hlinkClick r:id="rIdLINK0_paper"/>
               </a:rPr>
               <a:t>（arXiv 2609.04852）</a:t>
             </a:r>
@@ -13766,12 +13768,14 @@
             </a:pPr>
             <a:r>
               <a:rPr lang="en-US" sz="950" dirty="0">
+                <a:u ln="dash"/>
                 <a:solidFill>
                   <a:srgbClr val="9FB8C8"/>
                 </a:solidFill>
                 <a:latin typeface="Microsoft YaHei" pitchFamily="34" charset="0"/>
                 <a:ea typeface="Microsoft YaHei" pitchFamily="34" charset="-122"/>
                 <a:cs typeface="Microsoft YaHei" pitchFamily="34" charset="-120"/>
+                <a:hlinkClick r:id="rIdLINK0_paper"/>
               </a:rPr>
               <a:t>(arXiv 2609.04852 · Bilibili: FirePKU)</a:t>
             </a:r>
@@ -13884,12 +13888,14 @@
             </a:pPr>
             <a:r>
               <a:rPr lang="en-US" sz="950" dirty="0">
+                <a:u ln="dash"/>
                 <a:solidFill>
                   <a:srgbClr val="9FB8C8"/>
                 </a:solidFill>
                 <a:latin typeface="Microsoft YaHei" pitchFamily="34" charset="0"/>
                 <a:ea typeface="Microsoft YaHei" pitchFamily="34" charset="-122"/>
                 <a:cs typeface="Microsoft YaHei" pitchFamily="34" charset="-120"/>
+                <a:hlinkClick r:id="rIdLINK1_kvmem"/>
               </a:rPr>
               <a:t>kvmem/kvmem:</a:t>
             </a:r>
@@ -13942,7 +13948,7 @@
                 <a:ea typeface="Microsoft YaHei" pitchFamily="34" charset="-122"/>
                 <a:cs typeface="Microsoft YaHei" pitchFamily="34" charset="-120"/>
               </a:rPr>
-              <a:t>full acceptance &amp; failure records</a:t>
+              <a:t>systematic acceptance &amp; regression records</a:t>
             </a:r>
             <a:endParaRPr lang="en-US" sz="950" dirty="0"/>
           </a:p>
@@ -14053,12 +14059,14 @@
             </a:pPr>
             <a:r>
               <a:rPr lang="en-US" sz="950" dirty="0">
+                <a:u ln="dash"/>
                 <a:solidFill>
                   <a:srgbClr val="9FB8C8"/>
                 </a:solidFill>
                 <a:latin typeface="Microsoft YaHei" pitchFamily="34" charset="0"/>
                 <a:ea typeface="Microsoft YaHei" pitchFamily="34" charset="-122"/>
                 <a:cs typeface="Microsoft YaHei" pitchFamily="34" charset="-120"/>
+                <a:hlinkClick r:id="rIdLINK2_shensanshu"/>
               </a:rPr>
               <a:t>Shensanshu — first to combine NInfer × KVMem</a:t>
             </a:r>
@@ -14070,12 +14078,14 @@
             </a:pPr>
             <a:r>
               <a:rPr lang="en-US" sz="950" dirty="0">
+                <a:u ln="dash"/>
                 <a:solidFill>
                   <a:srgbClr val="9FB8C8"/>
                 </a:solidFill>
                 <a:latin typeface="Microsoft YaHei" pitchFamily="34" charset="0"/>
                 <a:ea typeface="Microsoft YaHei" pitchFamily="34" charset="-122"/>
                 <a:cs typeface="Microsoft YaHei" pitchFamily="34" charset="-120"/>
+                <a:hlinkClick r:id="rIdLINK3_tancau"/>
               </a:rPr>
               <a:t>tancau — Ring implementation · direct discussions</a:t>
             </a:r>
@@ -14087,12 +14097,14 @@
             </a:pPr>
             <a:r>
               <a:rPr lang="en-US" sz="950" dirty="0">
+                <a:u ln="dash"/>
                 <a:solidFill>
                   <a:srgbClr val="9FB8C8"/>
                 </a:solidFill>
                 <a:latin typeface="Microsoft YaHei" pitchFamily="34" charset="0"/>
                 <a:ea typeface="Microsoft YaHei" pitchFamily="34" charset="-122"/>
                 <a:cs typeface="Microsoft YaHei" pitchFamily="34" charset="-120"/>
+                <a:hlinkClick r:id="rIdLINK4_zxz"/>
               </a:rPr>
               <a:t>Shuaqi-de-zxz — 5060Ti line · fusion plan</a:t>
             </a:r>

--- a/docs/Async-Page-Pipeline-Technical-Brief.pptx
+++ b/docs/Async-Page-Pipeline-Technical-Brief.pptx
@@ -13768,10 +13768,10 @@
             </a:pPr>
             <a:r>
               <a:rPr lang="en-US" sz="950" dirty="0">
+                <a:solidFill>
+                  <a:srgbClr val="9FB8C8"/>
+                </a:solidFill>
                 <a:u ln="dash"/>
-                <a:solidFill>
-                  <a:srgbClr val="9FB8C8"/>
-                </a:solidFill>
                 <a:latin typeface="Microsoft YaHei" pitchFamily="34" charset="0"/>
                 <a:ea typeface="Microsoft YaHei" pitchFamily="34" charset="-122"/>
                 <a:cs typeface="Microsoft YaHei" pitchFamily="34" charset="-120"/>
@@ -13888,10 +13888,10 @@
             </a:pPr>
             <a:r>
               <a:rPr lang="en-US" sz="950" dirty="0">
+                <a:solidFill>
+                  <a:srgbClr val="9FB8C8"/>
+                </a:solidFill>
                 <a:u ln="dash"/>
-                <a:solidFill>
-                  <a:srgbClr val="9FB8C8"/>
-                </a:solidFill>
                 <a:latin typeface="Microsoft YaHei" pitchFamily="34" charset="0"/>
                 <a:ea typeface="Microsoft YaHei" pitchFamily="34" charset="-122"/>
                 <a:cs typeface="Microsoft YaHei" pitchFamily="34" charset="-120"/>
@@ -14059,16 +14059,35 @@
             </a:pPr>
             <a:r>
               <a:rPr lang="en-US" sz="950" dirty="0">
+                <a:solidFill>
+                  <a:srgbClr val="9FB8C8"/>
+                </a:solidFill>
                 <a:u ln="dash"/>
+                <a:latin typeface="Microsoft YaHei" pitchFamily="34" charset="0"/>
+                <a:ea typeface="Microsoft YaHei" pitchFamily="34" charset="-122"/>
+                <a:cs typeface="Microsoft YaHei" pitchFamily="34" charset="-120"/>
+                <a:hlinkClick r:id="rIdLINK2_shensanshu"/>
+              </a:rPr>
+              <a:t>Shensanshu — first to combine NInfer × KVMem</a:t>
+            </a:r>
+            <a:endParaRPr lang="en-US" sz="950" dirty="0"/>
+          </a:p>
+          <a:p>
+            <a:pPr indent="0" marL="0">
+              <a:buNone/>
+            </a:pPr>
+            <a:r>
+              <a:rPr lang="en-US" sz="950" dirty="0">
                 <a:solidFill>
                   <a:srgbClr val="9FB8C8"/>
                 </a:solidFill>
-                <a:latin typeface="Microsoft YaHei" pitchFamily="34" charset="0"/>
-                <a:ea typeface="Microsoft YaHei" pitchFamily="34" charset="-122"/>
-                <a:cs typeface="Microsoft YaHei" pitchFamily="34" charset="-120"/>
-                <a:hlinkClick r:id="rIdLINK2_shensanshu"/>
-              </a:rPr>
-              <a:t>Shensanshu — first to combine NInfer × KVMem</a:t>
+                <a:u ln="dash"/>
+                <a:latin typeface="Microsoft YaHei" pitchFamily="34" charset="0"/>
+                <a:ea typeface="Microsoft YaHei" pitchFamily="34" charset="-122"/>
+                <a:cs typeface="Microsoft YaHei" pitchFamily="34" charset="-120"/>
+                <a:hlinkClick r:id="rIdLINK3_tancau"/>
+              </a:rPr>
+              <a:t>tancau — Ring implementation · direct discussions</a:t>
             </a:r>
             <a:endParaRPr lang="en-US" sz="950" dirty="0"/>
           </a:p>
@@ -14078,52 +14097,83 @@
             </a:pPr>
             <a:r>
               <a:rPr lang="en-US" sz="950" dirty="0">
+                <a:solidFill>
+                  <a:srgbClr val="9FB8C8"/>
+                </a:solidFill>
                 <a:u ln="dash"/>
+                <a:latin typeface="Microsoft YaHei" pitchFamily="34" charset="0"/>
+                <a:ea typeface="Microsoft YaHei" pitchFamily="34" charset="-122"/>
+                <a:cs typeface="Microsoft YaHei" pitchFamily="34" charset="-120"/>
+                <a:hlinkClick r:id="rIdLINK4_zxz"/>
+              </a:rPr>
+              <a:t>Shuaqi-de-zxz — 5060Ti line · fusion plan</a:t>
+            </a:r>
+            <a:endParaRPr lang="en-US" sz="950" dirty="0"/>
+          </a:p>
+          <a:p>
+            <a:pPr indent="0" marL="0">
+              <a:buNone/>
+            </a:pPr>
+            <a:r>
+              <a:rPr lang="en-US" sz="950" dirty="0">
                 <a:solidFill>
                   <a:srgbClr val="9FB8C8"/>
                 </a:solidFill>
-                <a:latin typeface="Microsoft YaHei" pitchFamily="34" charset="0"/>
-                <a:ea typeface="Microsoft YaHei" pitchFamily="34" charset="-122"/>
-                <a:cs typeface="Microsoft YaHei" pitchFamily="34" charset="-120"/>
-                <a:hlinkClick r:id="rIdLINK3_tancau"/>
-              </a:rPr>
-              <a:t>tancau — Ring implementation · direct discussions</a:t>
-            </a:r>
-            <a:endParaRPr lang="en-US" sz="950" dirty="0"/>
-          </a:p>
-          <a:p>
-            <a:pPr indent="0" marL="0">
-              <a:buNone/>
-            </a:pPr>
+                <a:u ln="dash"/>
+                <a:latin typeface="Microsoft YaHei" pitchFamily="34" charset="0"/>
+                <a:ea typeface="Microsoft YaHei" pitchFamily="34" charset="-122"/>
+                <a:cs typeface="Microsoft YaHei" pitchFamily="34" charset="-120"/>
+                <a:hlinkClick r:id="rIdECO3"/>
+              </a:rPr>
+              <a:t>llama.cpp</a:t>
+            </a:r>
             <a:r>
               <a:rPr lang="en-US" sz="950" dirty="0">
+                <a:solidFill>
+                  <a:srgbClr val="9FB8C8"/>
+                </a:solidFill>
+                <a:latin typeface="Microsoft YaHei" pitchFamily="34" charset="0"/>
+                <a:ea typeface="Microsoft YaHei" pitchFamily="34" charset="-122"/>
+                <a:cs typeface="Microsoft YaHei" pitchFamily="34" charset="-120"/>
+              </a:rPr>
+              <a:t> · </a:t>
+            </a:r>
+            <a:r>
+              <a:rPr lang="en-US" sz="950" dirty="0">
+                <a:solidFill>
+                  <a:srgbClr val="9FB8C8"/>
+                </a:solidFill>
                 <a:u ln="dash"/>
+                <a:latin typeface="Microsoft YaHei" pitchFamily="34" charset="0"/>
+                <a:ea typeface="Microsoft YaHei" pitchFamily="34" charset="-122"/>
+                <a:cs typeface="Microsoft YaHei" pitchFamily="34" charset="-120"/>
+                <a:hlinkClick r:id="rIdECO4"/>
+              </a:rPr>
+              <a:t>Neroued/ninfer</a:t>
+            </a:r>
+            <a:r>
+              <a:rPr lang="en-US" sz="950" dirty="0">
                 <a:solidFill>
                   <a:srgbClr val="9FB8C8"/>
                 </a:solidFill>
                 <a:latin typeface="Microsoft YaHei" pitchFamily="34" charset="0"/>
                 <a:ea typeface="Microsoft YaHei" pitchFamily="34" charset="-122"/>
                 <a:cs typeface="Microsoft YaHei" pitchFamily="34" charset="-120"/>
-                <a:hlinkClick r:id="rIdLINK4_zxz"/>
-              </a:rPr>
-              <a:t>Shuaqi-de-zxz — 5060Ti line · fusion plan</a:t>
-            </a:r>
-            <a:endParaRPr lang="en-US" sz="950" dirty="0"/>
-          </a:p>
-          <a:p>
-            <a:pPr indent="0" marL="0">
-              <a:buNone/>
-            </a:pPr>
+              </a:rPr>
+              <a:t> · </a:t>
+            </a:r>
             <a:r>
               <a:rPr lang="en-US" sz="950" dirty="0">
                 <a:solidFill>
                   <a:srgbClr val="9FB8C8"/>
                 </a:solidFill>
-                <a:latin typeface="Microsoft YaHei" pitchFamily="34" charset="0"/>
-                <a:ea typeface="Microsoft YaHei" pitchFamily="34" charset="-122"/>
-                <a:cs typeface="Microsoft YaHei" pitchFamily="34" charset="-120"/>
-              </a:rPr>
-              <a:t>llama.cpp · Neroued/ninfer · iamwavecut/ninfer-all</a:t>
+                <a:u ln="dash"/>
+                <a:latin typeface="Microsoft YaHei" pitchFamily="34" charset="0"/>
+                <a:ea typeface="Microsoft YaHei" pitchFamily="34" charset="-122"/>
+                <a:cs typeface="Microsoft YaHei" pitchFamily="34" charset="-120"/>
+                <a:hlinkClick r:id="rIdECO5"/>
+              </a:rPr>
+              <a:t>iamwavecut/ninfer-all</a:t>
             </a:r>
             <a:endParaRPr lang="en-US" sz="950" dirty="0"/>
           </a:p>
